--- a/public/decks/petfood.pptx
+++ b/public/decks/petfood.pptx
@@ -1597,13 +1597,14 @@
         </p:nvPicPr>
         <p:blipFill>
           <a:blip r:embed="rId1"/>
-          <a:srcRect l="0" r="0" t="0" b="0"/>
-          <a:stretch/>
+          <a:stretch>
+            <a:fillRect/>
+          </a:stretch>
         </p:blipFill>
         <p:spPr>
           <a:xfrm>
-            <a:off x="5212080" y="0"/>
-            <a:ext cx="6979615" cy="6858000"/>
+            <a:off x="6117336" y="0"/>
+            <a:ext cx="5212080" cy="6858000"/>
           </a:xfrm>
           <a:prstGeom prst="rect">
             <a:avLst/>
@@ -2500,7 +2501,7 @@
         </p:nvSpPr>
         <p:spPr>
           <a:xfrm>
-            <a:off x="731520" y="2404872"/>
+            <a:off x="731520" y="2770632"/>
             <a:ext cx="310896" cy="310896"/>
           </a:xfrm>
           <a:prstGeom prst="ellipse">
@@ -2520,7 +2521,7 @@
         </p:nvSpPr>
         <p:spPr>
           <a:xfrm>
-            <a:off x="1234440" y="2331720"/>
+            <a:off x="1234440" y="2697480"/>
             <a:ext cx="4572000" cy="384048"/>
           </a:xfrm>
           <a:prstGeom prst="rect">
@@ -2559,7 +2560,7 @@
         </p:nvSpPr>
         <p:spPr>
           <a:xfrm>
-            <a:off x="1234440" y="2734056"/>
+            <a:off x="1234440" y="3099816"/>
             <a:ext cx="4572000" cy="640080"/>
           </a:xfrm>
           <a:prstGeom prst="rect">
@@ -2598,7 +2599,7 @@
         </p:nvSpPr>
         <p:spPr>
           <a:xfrm>
-            <a:off x="731520" y="3593592"/>
+            <a:off x="731520" y="3959352"/>
             <a:ext cx="310896" cy="310896"/>
           </a:xfrm>
           <a:prstGeom prst="ellipse">
@@ -2618,7 +2619,7 @@
         </p:nvSpPr>
         <p:spPr>
           <a:xfrm>
-            <a:off x="1234440" y="3520440"/>
+            <a:off x="1234440" y="3886200"/>
             <a:ext cx="4572000" cy="384048"/>
           </a:xfrm>
           <a:prstGeom prst="rect">
@@ -2657,7 +2658,7 @@
         </p:nvSpPr>
         <p:spPr>
           <a:xfrm>
-            <a:off x="1234440" y="3922776"/>
+            <a:off x="1234440" y="4288536"/>
             <a:ext cx="4572000" cy="640080"/>
           </a:xfrm>
           <a:prstGeom prst="rect">
@@ -2696,7 +2697,7 @@
         </p:nvSpPr>
         <p:spPr>
           <a:xfrm>
-            <a:off x="731520" y="4782312"/>
+            <a:off x="731520" y="5148072"/>
             <a:ext cx="310896" cy="310896"/>
           </a:xfrm>
           <a:prstGeom prst="ellipse">
@@ -2716,7 +2717,7 @@
         </p:nvSpPr>
         <p:spPr>
           <a:xfrm>
-            <a:off x="1234440" y="4709160"/>
+            <a:off x="1234440" y="5074920"/>
             <a:ext cx="4572000" cy="384048"/>
           </a:xfrm>
           <a:prstGeom prst="rect">
@@ -2755,7 +2756,7 @@
         </p:nvSpPr>
         <p:spPr>
           <a:xfrm>
-            <a:off x="1234440" y="5111496"/>
+            <a:off x="1234440" y="5477256"/>
             <a:ext cx="4572000" cy="640080"/>
           </a:xfrm>
           <a:prstGeom prst="rect">
@@ -2934,8 +2935,8 @@
         </p:blipFill>
         <p:spPr>
           <a:xfrm>
-            <a:off x="3063240" y="1965960"/>
-            <a:ext cx="6035040" cy="4288536"/>
+            <a:off x="3310128" y="2240280"/>
+            <a:ext cx="5577840" cy="3502152"/>
           </a:xfrm>
           <a:prstGeom prst="rect">
             <a:avLst/>
@@ -3090,7 +3091,7 @@
         </p:blipFill>
         <p:spPr>
           <a:xfrm>
-            <a:off x="1234440" y="2148840"/>
+            <a:off x="1252728" y="2377440"/>
             <a:ext cx="9692640" cy="3685032"/>
           </a:xfrm>
           <a:prstGeom prst="rect">
@@ -4454,13 +4455,14 @@
         </p:nvPicPr>
         <p:blipFill>
           <a:blip r:embed="rId1"/>
-          <a:srcRect l="0" r="0" t="0" b="0"/>
-          <a:stretch/>
+          <a:stretch>
+            <a:fillRect/>
+          </a:stretch>
         </p:blipFill>
         <p:spPr>
           <a:xfrm>
-            <a:off x="0" y="0"/>
-            <a:ext cx="5852160" cy="6858000"/>
+            <a:off x="292608" y="0"/>
+            <a:ext cx="5212080" cy="6858000"/>
           </a:xfrm>
           <a:prstGeom prst="rect">
             <a:avLst/>

--- a/public/decks/petfood.pptx
+++ b/public/decks/petfood.pptx
@@ -1589,7 +1589,7 @@
       </p:grpSpPr>
       <p:pic>
         <p:nvPicPr>
-          <p:cNvPr id="2" name="Image 0" descr="C:\Users\79204\AppData\Local\Temp\claude\D--QQQAAA\1af986dc-9216-4466-ab30-3032c2f138c7\scratchpad\deck\img\pf-hero.png">    </p:cNvPr>
+          <p:cNvPr id="2" name="Image 0" descr="C:\Users\79204\AppData\Local\Temp\claude\D--QQQAAA\1af986dc-9216-4466-ab30-3032c2f138c7\scratchpad\deck\img\pf-hero-right.png">    </p:cNvPr>
           <p:cNvPicPr>
             <a:picLocks noChangeAspect="1"/>
           </p:cNvPicPr>
@@ -1603,8 +1603,8 @@
         </p:blipFill>
         <p:spPr>
           <a:xfrm>
-            <a:off x="6117336" y="0"/>
-            <a:ext cx="5212080" cy="6858000"/>
+            <a:off x="5257800" y="0"/>
+            <a:ext cx="6933895" cy="6858000"/>
           </a:xfrm>
           <a:prstGeom prst="rect">
             <a:avLst/>
@@ -4447,7 +4447,7 @@
       </p:grpSpPr>
       <p:pic>
         <p:nvPicPr>
-          <p:cNvPr id="2" name="Image 0" descr="C:\Users\79204\AppData\Local\Temp\claude\D--QQQAAA\1af986dc-9216-4466-ab30-3032c2f138c7\scratchpad\deck\img\pf-hero.png">    </p:cNvPr>
+          <p:cNvPr id="2" name="Image 0" descr="C:\Users\79204\AppData\Local\Temp\claude\D--QQQAAA\1af986dc-9216-4466-ab30-3032c2f138c7\scratchpad\deck\img\pf-hero-left.png">    </p:cNvPr>
           <p:cNvPicPr>
             <a:picLocks noChangeAspect="1"/>
           </p:cNvPicPr>
@@ -4461,8 +4461,8 @@
         </p:blipFill>
         <p:spPr>
           <a:xfrm>
-            <a:off x="292608" y="0"/>
-            <a:ext cx="5212080" cy="6858000"/>
+            <a:off x="0" y="0"/>
+            <a:ext cx="5806440" cy="6858000"/>
           </a:xfrm>
           <a:prstGeom prst="rect">
             <a:avLst/>
